--- a/주제탐구_포스터_수정본.pptx
+++ b/주제탐구_포스터_수정본.pptx
@@ -131,12 +131,12 @@
   <pc:docChgLst>
     <pc:chgData name="서혁 김" userId="673a45dc699d0b3e" providerId="LiveId" clId="{B83A4E28-A29A-43FB-A79E-2E1372E663CB}"/>
     <pc:docChg chg="undo custSel modSld">
-      <pc:chgData name="서혁 김" userId="673a45dc699d0b3e" providerId="LiveId" clId="{B83A4E28-A29A-43FB-A79E-2E1372E663CB}" dt="2026-07-02T13:13:55.256" v="204" actId="313"/>
+      <pc:chgData name="서혁 김" userId="673a45dc699d0b3e" providerId="LiveId" clId="{B83A4E28-A29A-43FB-A79E-2E1372E663CB}" dt="2026-07-03T04:43:49.475" v="235" actId="1036"/>
       <pc:docMkLst>
         <pc:docMk/>
       </pc:docMkLst>
       <pc:sldChg chg="modSp mod">
-        <pc:chgData name="서혁 김" userId="673a45dc699d0b3e" providerId="LiveId" clId="{B83A4E28-A29A-43FB-A79E-2E1372E663CB}" dt="2026-07-02T13:13:55.256" v="204" actId="313"/>
+        <pc:chgData name="서혁 김" userId="673a45dc699d0b3e" providerId="LiveId" clId="{B83A4E28-A29A-43FB-A79E-2E1372E663CB}" dt="2026-07-03T04:43:49.475" v="235" actId="1036"/>
         <pc:sldMkLst>
           <pc:docMk/>
           <pc:sldMk cId="2775059156" sldId="256"/>
@@ -150,6 +150,14 @@
           </ac:spMkLst>
         </pc:spChg>
         <pc:spChg chg="mod">
+          <ac:chgData name="서혁 김" userId="673a45dc699d0b3e" providerId="LiveId" clId="{B83A4E28-A29A-43FB-A79E-2E1372E663CB}" dt="2026-07-03T04:42:54.386" v="208" actId="1035"/>
+          <ac:spMkLst>
+            <pc:docMk/>
+            <pc:sldMk cId="2775059156" sldId="256"/>
+            <ac:spMk id="6" creationId="{00000000-0000-0000-0000-000000000000}"/>
+          </ac:spMkLst>
+        </pc:spChg>
+        <pc:spChg chg="mod">
           <ac:chgData name="서혁 김" userId="673a45dc699d0b3e" providerId="LiveId" clId="{B83A4E28-A29A-43FB-A79E-2E1372E663CB}" dt="2026-07-02T13:13:17.972" v="181" actId="20577"/>
           <ac:spMkLst>
             <pc:docMk/>
@@ -158,7 +166,7 @@
           </ac:spMkLst>
         </pc:spChg>
         <pc:spChg chg="mod">
-          <ac:chgData name="서혁 김" userId="673a45dc699d0b3e" providerId="LiveId" clId="{B83A4E28-A29A-43FB-A79E-2E1372E663CB}" dt="2026-07-02T13:13:39.908" v="198" actId="20577"/>
+          <ac:chgData name="서혁 김" userId="673a45dc699d0b3e" providerId="LiveId" clId="{B83A4E28-A29A-43FB-A79E-2E1372E663CB}" dt="2026-07-03T04:43:33.775" v="229" actId="1035"/>
           <ac:spMkLst>
             <pc:docMk/>
             <pc:sldMk cId="2775059156" sldId="256"/>
@@ -171,6 +179,22 @@
             <pc:docMk/>
             <pc:sldMk cId="2775059156" sldId="256"/>
             <ac:picMk id="3" creationId="{1C3B43D1-5084-0DBF-18DC-F83ACDB330BC}"/>
+          </ac:picMkLst>
+        </pc:picChg>
+        <pc:picChg chg="mod">
+          <ac:chgData name="서혁 김" userId="673a45dc699d0b3e" providerId="LiveId" clId="{B83A4E28-A29A-43FB-A79E-2E1372E663CB}" dt="2026-07-03T04:43:49.475" v="235" actId="1036"/>
+          <ac:picMkLst>
+            <pc:docMk/>
+            <pc:sldMk cId="2775059156" sldId="256"/>
+            <ac:picMk id="10" creationId="{8007F3B4-56D0-155B-7318-10114163A753}"/>
+          </ac:picMkLst>
+        </pc:picChg>
+        <pc:picChg chg="mod">
+          <ac:chgData name="서혁 김" userId="673a45dc699d0b3e" providerId="LiveId" clId="{B83A4E28-A29A-43FB-A79E-2E1372E663CB}" dt="2026-07-03T04:43:33.775" v="229" actId="1035"/>
+          <ac:picMkLst>
+            <pc:docMk/>
+            <pc:sldMk cId="2775059156" sldId="256"/>
+            <ac:picMk id="21" creationId="{5A5D5F54-4C9C-B201-47E4-3DEDA43309C0}"/>
           </ac:picMkLst>
         </pc:picChg>
       </pc:sldChg>
@@ -261,7 +285,7 @@
           <a:p>
             <a:fld id="{678876DD-2ECB-4391-8BA8-BB23CD9FC081}" type="datetimeFigureOut">
               <a:rPr lang="ko-KR" altLang="en-US" smtClean="0"/>
-              <a:t>2026. 7. 3.</a:t>
+              <a:t>2026-07-03</a:t>
             </a:fld>
             <a:endParaRPr lang="ko-KR" altLang="en-US"/>
           </a:p>
@@ -876,7 +900,7 @@
           <a:p>
             <a:fld id="{65A0B9EE-98E3-481A-A7E8-04A8CF889727}" type="datetimeFigureOut">
               <a:rPr lang="ko-KR" altLang="en-US" smtClean="0"/>
-              <a:t>2026. 7. 3.</a:t>
+              <a:t>2026-07-03</a:t>
             </a:fld>
             <a:endParaRPr lang="ko-KR" altLang="en-US"/>
           </a:p>
@@ -1086,7 +1110,7 @@
           <a:p>
             <a:fld id="{65A0B9EE-98E3-481A-A7E8-04A8CF889727}" type="datetimeFigureOut">
               <a:rPr lang="ko-KR" altLang="en-US" smtClean="0"/>
-              <a:t>2026. 7. 3.</a:t>
+              <a:t>2026-07-03</a:t>
             </a:fld>
             <a:endParaRPr lang="ko-KR" altLang="en-US"/>
           </a:p>
@@ -1296,7 +1320,7 @@
           <a:p>
             <a:fld id="{65A0B9EE-98E3-481A-A7E8-04A8CF889727}" type="datetimeFigureOut">
               <a:rPr lang="ko-KR" altLang="en-US" smtClean="0"/>
-              <a:t>2026. 7. 3.</a:t>
+              <a:t>2026-07-03</a:t>
             </a:fld>
             <a:endParaRPr lang="ko-KR" altLang="en-US"/>
           </a:p>
@@ -1570,7 +1594,7 @@
           <a:p>
             <a:fld id="{65A0B9EE-98E3-481A-A7E8-04A8CF889727}" type="datetimeFigureOut">
               <a:rPr lang="ko-KR" altLang="en-US" smtClean="0"/>
-              <a:t>2026. 7. 3.</a:t>
+              <a:t>2026-07-03</a:t>
             </a:fld>
             <a:endParaRPr lang="ko-KR" altLang="en-US"/>
           </a:p>
@@ -1840,7 +1864,7 @@
           <a:p>
             <a:fld id="{65A0B9EE-98E3-481A-A7E8-04A8CF889727}" type="datetimeFigureOut">
               <a:rPr lang="ko-KR" altLang="en-US" smtClean="0"/>
-              <a:t>2026. 7. 3.</a:t>
+              <a:t>2026-07-03</a:t>
             </a:fld>
             <a:endParaRPr lang="ko-KR" altLang="en-US"/>
           </a:p>
@@ -2246,7 +2270,7 @@
           <a:p>
             <a:fld id="{65A0B9EE-98E3-481A-A7E8-04A8CF889727}" type="datetimeFigureOut">
               <a:rPr lang="ko-KR" altLang="en-US" smtClean="0"/>
-              <a:t>2026. 7. 3.</a:t>
+              <a:t>2026-07-03</a:t>
             </a:fld>
             <a:endParaRPr lang="ko-KR" altLang="en-US"/>
           </a:p>
@@ -2396,7 +2420,7 @@
           <a:p>
             <a:fld id="{65A0B9EE-98E3-481A-A7E8-04A8CF889727}" type="datetimeFigureOut">
               <a:rPr lang="ko-KR" altLang="en-US" smtClean="0"/>
-              <a:t>2026. 7. 3.</a:t>
+              <a:t>2026-07-03</a:t>
             </a:fld>
             <a:endParaRPr lang="ko-KR" altLang="en-US"/>
           </a:p>
@@ -2515,7 +2539,7 @@
           <a:p>
             <a:fld id="{65A0B9EE-98E3-481A-A7E8-04A8CF889727}" type="datetimeFigureOut">
               <a:rPr lang="ko-KR" altLang="en-US" smtClean="0"/>
-              <a:t>2026. 7. 3.</a:t>
+              <a:t>2026-07-03</a:t>
             </a:fld>
             <a:endParaRPr lang="ko-KR" altLang="en-US"/>
           </a:p>
@@ -2825,7 +2849,7 @@
           <a:p>
             <a:fld id="{65A0B9EE-98E3-481A-A7E8-04A8CF889727}" type="datetimeFigureOut">
               <a:rPr lang="ko-KR" altLang="en-US" smtClean="0"/>
-              <a:t>2026. 7. 3.</a:t>
+              <a:t>2026-07-03</a:t>
             </a:fld>
             <a:endParaRPr lang="ko-KR" altLang="en-US"/>
           </a:p>
@@ -3115,7 +3139,7 @@
           <a:p>
             <a:fld id="{65A0B9EE-98E3-481A-A7E8-04A8CF889727}" type="datetimeFigureOut">
               <a:rPr lang="ko-KR" altLang="en-US" smtClean="0"/>
-              <a:t>2026. 7. 3.</a:t>
+              <a:t>2026-07-03</a:t>
             </a:fld>
             <a:endParaRPr lang="ko-KR" altLang="en-US"/>
           </a:p>
@@ -4066,7 +4090,7 @@
         </p:nvSpPr>
         <p:spPr>
           <a:xfrm>
-            <a:off x="4937344" y="1926661"/>
+            <a:off x="4937344" y="1907609"/>
             <a:ext cx="1536192" cy="898323"/>
           </a:xfrm>
           <a:prstGeom prst="rect">
@@ -5283,7 +5307,7 @@
                 <a:spcPts val="300"/>
               </a:spcAft>
             </a:pPr>
-            <a:endParaRPr lang="en-US" altLang="ko-KR" sz="750" dirty="0">
+            <a:endParaRPr lang="en-US" altLang="ko-KR" sz="1100" dirty="0">
               <a:latin typeface="맑은 고딕"/>
               <a:ea typeface="맑은 고딕"/>
             </a:endParaRPr>
@@ -5294,7 +5318,7 @@
                 <a:spcPts val="300"/>
               </a:spcAft>
             </a:pPr>
-            <a:endParaRPr lang="en-US" altLang="ko-KR" sz="750" b="1" dirty="0">
+            <a:endParaRPr lang="en-US" altLang="ko-KR" sz="1100" b="1" dirty="0">
               <a:solidFill>
                 <a:srgbClr val="1E2761"/>
               </a:solidFill>
@@ -5308,7 +5332,7 @@
                 <a:spcPts val="300"/>
               </a:spcAft>
             </a:pPr>
-            <a:endParaRPr lang="en-US" altLang="ko-KR" sz="750" dirty="0"/>
+            <a:endParaRPr lang="en-US" altLang="ko-KR" sz="1100" dirty="0"/>
           </a:p>
           <a:p>
             <a:pPr algn="l">
@@ -5316,7 +5340,7 @@
                 <a:spcPts val="300"/>
               </a:spcAft>
             </a:pPr>
-            <a:endParaRPr lang="en-US" altLang="ko-KR" dirty="0"/>
+            <a:endParaRPr lang="en-US" altLang="ko-KR" sz="1100" dirty="0"/>
           </a:p>
           <a:p>
             <a:pPr>
@@ -9128,7 +9152,7 @@
         </p:blipFill>
         <p:spPr>
           <a:xfrm>
-            <a:off x="680461" y="4316145"/>
+            <a:off x="680461" y="4339005"/>
             <a:ext cx="2470384" cy="1119166"/>
           </a:xfrm>
           <a:prstGeom prst="rect">

--- a/주제탐구_포스터_수정본.pptx
+++ b/주제탐구_포스터_수정본.pptx
@@ -285,7 +285,7 @@
           <a:p>
             <a:fld id="{678876DD-2ECB-4391-8BA8-BB23CD9FC081}" type="datetimeFigureOut">
               <a:rPr lang="ko-KR" altLang="en-US" smtClean="0"/>
-              <a:t>2026-07-03</a:t>
+              <a:t>2026. 7. 3.</a:t>
             </a:fld>
             <a:endParaRPr lang="ko-KR" altLang="en-US"/>
           </a:p>
@@ -900,7 +900,7 @@
           <a:p>
             <a:fld id="{65A0B9EE-98E3-481A-A7E8-04A8CF889727}" type="datetimeFigureOut">
               <a:rPr lang="ko-KR" altLang="en-US" smtClean="0"/>
-              <a:t>2026-07-03</a:t>
+              <a:t>2026. 7. 3.</a:t>
             </a:fld>
             <a:endParaRPr lang="ko-KR" altLang="en-US"/>
           </a:p>
@@ -1110,7 +1110,7 @@
           <a:p>
             <a:fld id="{65A0B9EE-98E3-481A-A7E8-04A8CF889727}" type="datetimeFigureOut">
               <a:rPr lang="ko-KR" altLang="en-US" smtClean="0"/>
-              <a:t>2026-07-03</a:t>
+              <a:t>2026. 7. 3.</a:t>
             </a:fld>
             <a:endParaRPr lang="ko-KR" altLang="en-US"/>
           </a:p>
@@ -1320,7 +1320,7 @@
           <a:p>
             <a:fld id="{65A0B9EE-98E3-481A-A7E8-04A8CF889727}" type="datetimeFigureOut">
               <a:rPr lang="ko-KR" altLang="en-US" smtClean="0"/>
-              <a:t>2026-07-03</a:t>
+              <a:t>2026. 7. 3.</a:t>
             </a:fld>
             <a:endParaRPr lang="ko-KR" altLang="en-US"/>
           </a:p>
@@ -1594,7 +1594,7 @@
           <a:p>
             <a:fld id="{65A0B9EE-98E3-481A-A7E8-04A8CF889727}" type="datetimeFigureOut">
               <a:rPr lang="ko-KR" altLang="en-US" smtClean="0"/>
-              <a:t>2026-07-03</a:t>
+              <a:t>2026. 7. 3.</a:t>
             </a:fld>
             <a:endParaRPr lang="ko-KR" altLang="en-US"/>
           </a:p>
@@ -1864,7 +1864,7 @@
           <a:p>
             <a:fld id="{65A0B9EE-98E3-481A-A7E8-04A8CF889727}" type="datetimeFigureOut">
               <a:rPr lang="ko-KR" altLang="en-US" smtClean="0"/>
-              <a:t>2026-07-03</a:t>
+              <a:t>2026. 7. 3.</a:t>
             </a:fld>
             <a:endParaRPr lang="ko-KR" altLang="en-US"/>
           </a:p>
@@ -2270,7 +2270,7 @@
           <a:p>
             <a:fld id="{65A0B9EE-98E3-481A-A7E8-04A8CF889727}" type="datetimeFigureOut">
               <a:rPr lang="ko-KR" altLang="en-US" smtClean="0"/>
-              <a:t>2026-07-03</a:t>
+              <a:t>2026. 7. 3.</a:t>
             </a:fld>
             <a:endParaRPr lang="ko-KR" altLang="en-US"/>
           </a:p>
@@ -2420,7 +2420,7 @@
           <a:p>
             <a:fld id="{65A0B9EE-98E3-481A-A7E8-04A8CF889727}" type="datetimeFigureOut">
               <a:rPr lang="ko-KR" altLang="en-US" smtClean="0"/>
-              <a:t>2026-07-03</a:t>
+              <a:t>2026. 7. 3.</a:t>
             </a:fld>
             <a:endParaRPr lang="ko-KR" altLang="en-US"/>
           </a:p>
@@ -2539,7 +2539,7 @@
           <a:p>
             <a:fld id="{65A0B9EE-98E3-481A-A7E8-04A8CF889727}" type="datetimeFigureOut">
               <a:rPr lang="ko-KR" altLang="en-US" smtClean="0"/>
-              <a:t>2026-07-03</a:t>
+              <a:t>2026. 7. 3.</a:t>
             </a:fld>
             <a:endParaRPr lang="ko-KR" altLang="en-US"/>
           </a:p>
@@ -2849,7 +2849,7 @@
           <a:p>
             <a:fld id="{65A0B9EE-98E3-481A-A7E8-04A8CF889727}" type="datetimeFigureOut">
               <a:rPr lang="ko-KR" altLang="en-US" smtClean="0"/>
-              <a:t>2026-07-03</a:t>
+              <a:t>2026. 7. 3.</a:t>
             </a:fld>
             <a:endParaRPr lang="ko-KR" altLang="en-US"/>
           </a:p>
@@ -3139,7 +3139,7 @@
           <a:p>
             <a:fld id="{65A0B9EE-98E3-481A-A7E8-04A8CF889727}" type="datetimeFigureOut">
               <a:rPr lang="ko-KR" altLang="en-US" smtClean="0"/>
-              <a:t>2026-07-03</a:t>
+              <a:t>2026. 7. 3.</a:t>
             </a:fld>
             <a:endParaRPr lang="ko-KR" altLang="en-US"/>
           </a:p>
@@ -5805,7 +5805,21 @@
                 <a:latin typeface="맑은 고딕"/>
                 <a:ea typeface="맑은 고딕"/>
               </a:rPr>
-              <a:t>전체가 동시에 급상승하는지 특정 그룹부터 차례로 상승하는지 판별한다</a:t>
+              <a:t>어떤 형태로 </a:t>
+            </a:r>
+            <a:r>
+              <a:rPr lang="en-US" altLang="ko-KR" sz="750" dirty="0">
+                <a:latin typeface="맑은 고딕"/>
+                <a:ea typeface="맑은 고딕"/>
+              </a:rPr>
+              <a:t>Grokking</a:t>
+            </a:r>
+            <a:r>
+              <a:rPr lang="ko-KR" altLang="en-US" sz="750" dirty="0">
+                <a:latin typeface="맑은 고딕"/>
+                <a:ea typeface="맑은 고딕"/>
+              </a:rPr>
+              <a:t>이 진행되는지 판별한다</a:t>
             </a:r>
             <a:r>
               <a:rPr lang="en-US" altLang="ko-KR" sz="750" dirty="0">
@@ -8110,7 +8124,7 @@
         </p:blipFill>
         <p:spPr>
           <a:xfrm>
-            <a:off x="3466544" y="7545532"/>
+            <a:off x="3460705" y="7378952"/>
             <a:ext cx="3018925" cy="1003375"/>
           </a:xfrm>
           <a:prstGeom prst="rect">
